--- a/docs/content/catchup/catchup_lecture.pptx
+++ b/docs/content/catchup/catchup_lecture.pptx
@@ -3433,7 +3433,7 @@
             </a:r>
             <a:r>
               <a:rPr/>
-              <a:t>. We use it to go back over whatever from Lectures 01–07 is not sticking yet — as a class, in small groups, or one-on-one while everyone else works ahead on Homework 05/06 or gets a head start on Worksheet 07.</a:t>
+              <a:t>. We use it to go back over whatever from Lectures 01–07 is not sticking yet — as a class, in small groups, or one-on-one while everyone else works ahead on the Wrangling / Summary Statistics extensions or gets a head start on Worksheet 07.</a:t>
             </a:r>
           </a:p>
           <a:p>
@@ -4355,7 +4355,7 @@
             </a:r>
             <a:r>
               <a:rPr/>
-              <a:t>: start Worksheet 07 (Quarto) or Homework 06 (Summary Statistics) if you’re solid on everything above</a:t>
+              <a:t>: start Worksheet 07 (Quarto) or the Summary Statistics extension if you’re solid on everything above</a:t>
             </a:r>
           </a:p>
         </p:txBody>

--- a/docs/content/catchup/catchup_lecture.pptx
+++ b/docs/content/catchup/catchup_lecture.pptx
@@ -3345,7 +3345,7 @@
             </a:pPr>
             <a:r>
               <a:rPr/>
-              <a:t>2026-08-27</a:t>
+              <a:t>2026-09-01</a:t>
             </a:r>
           </a:p>
         </p:txBody>

--- a/docs/content/catchup/catchup_lecture.pptx
+++ b/docs/content/catchup/catchup_lecture.pptx
@@ -3345,7 +3345,7 @@
             </a:pPr>
             <a:r>
               <a:rPr/>
-              <a:t>2026-09-01</a:t>
+              <a:t>2026-09-03</a:t>
             </a:r>
           </a:p>
         </p:txBody>

--- a/docs/content/catchup/catchup_lecture.pptx
+++ b/docs/content/catchup/catchup_lecture.pptx
@@ -3345,7 +3345,7 @@
             </a:pPr>
             <a:r>
               <a:rPr/>
-              <a:t>2026-09-03</a:t>
+              <a:t>2026-09-04</a:t>
             </a:r>
           </a:p>
         </p:txBody>
